--- a/docs/quickguides/pkw/pptx/05_Quick_Guide_oneSCM_Fahrzeug_Produkt_und_Angebot_vorbereiten_Pkw.pptx
+++ b/docs/quickguides/pkw/pptx/05_Quick_Guide_oneSCM_Fahrzeug_Produkt_und_Angebot_vorbereiten_Pkw.pptx
@@ -3787,7 +3787,7 @@
                 <a:ea typeface="MB Corpo S Text Office" pitchFamily="34" charset="-122"/>
                 <a:cs typeface="MB Corpo S Text Office" pitchFamily="34" charset="-120"/>
               </a:rPr>
-              <a:t> Das Baumuster für eine Preisindikation; ab Angebot die OTR-Deal-ID, ab Bestellung die VerSO-Order-ID.</a:t>
+              <a:t> Das Baumuster für eine Preisindikation; ab Angebot die OTR-Deal-ID, ab Bestellung die Auftragsnummer aus GO.</a:t>
             </a:r>
             <a:endParaRPr lang="en-US" sz="900" dirty="0"/>
           </a:p>

--- a/docs/quickguides/pkw/pptx/05_Quick_Guide_oneSCM_Fahrzeug_Produkt_und_Angebot_vorbereiten_Pkw.pptx
+++ b/docs/quickguides/pkw/pptx/05_Quick_Guide_oneSCM_Fahrzeug_Produkt_und_Angebot_vorbereiten_Pkw.pptx
@@ -1503,7 +1503,7 @@
                 <a:ea typeface="MB Corpo S Text Office" pitchFamily="34" charset="-122"/>
                 <a:cs typeface="MB Corpo S Text Office" pitchFamily="34" charset="-120"/>
               </a:rPr>
-              <a:t>Dieses Dokument ist interaktiv – Verweise auf Handbuchkapitel und Systeme sind als Links hinterlegt.</a:t>
+              <a:t>Verweise auf Handbuchkapitel und Systeme sind hervorgehoben; E-Mail-Adressen sind als Links hinterlegt.</a:t>
             </a:r>
             <a:endParaRPr lang="en-US" sz="900" dirty="0"/>
           </a:p>
@@ -3243,11 +3243,11 @@
         <p:spPr>
           <a:xfrm>
             <a:off x="201168" y="4242816"/>
-            <a:ext cx="4663440" cy="1463040"/>
+            <a:ext cx="4663440" cy="2084832"/>
           </a:xfrm>
           <a:prstGeom prst="roundRect">
             <a:avLst>
-              <a:gd name="adj" fmla="val 6250"/>
+              <a:gd name="adj" fmla="val 4386"/>
             </a:avLst>
           </a:prstGeom>
           <a:solidFill>
@@ -3311,7 +3311,7 @@
         <p:spPr>
           <a:xfrm>
             <a:off x="310896" y="4590288"/>
-            <a:ext cx="4480560" cy="1060704"/>
+            <a:ext cx="4480560" cy="1682496"/>
           </a:xfrm>
           <a:prstGeom prst="rect">
             <a:avLst/>
@@ -3360,7 +3360,28 @@
                 <a:ea typeface="MB Corpo S Text Office" pitchFamily="34" charset="-122"/>
                 <a:cs typeface="MB Corpo S Text Office" pitchFamily="34" charset="-120"/>
               </a:rPr>
-              <a:t>Bedingungen und Konditionen sowie Händlerinformationen lassen sich über die Symbole dauerhaft einblenden.</a:t>
+              <a:t>Baumuster mit sechs, sieben und acht Stellen sind zulässig; Contingent-Produkte (Verkaufslogik „FRD Not Related“) finden Sie über das Baumuster, nicht über FIN/VIN (5.4).</a:t>
+            </a:r>
+            <a:endParaRPr lang="en-US" sz="900" dirty="0"/>
+          </a:p>
+          <a:p>
+            <a:pPr marL="152400" indent="-152400">
+              <a:spcAft>
+                <a:spcPts val="200"/>
+              </a:spcAft>
+              <a:buSzPct val="100000"/>
+              <a:buChar char="•"/>
+            </a:pPr>
+            <a:r>
+              <a:rPr lang="en-US" sz="900" dirty="0">
+                <a:solidFill>
+                  <a:srgbClr val="262626"/>
+                </a:solidFill>
+                <a:latin typeface="MB Corpo S Text Office" pitchFamily="34" charset="0"/>
+                <a:ea typeface="MB Corpo S Text Office" pitchFamily="34" charset="-122"/>
+                <a:cs typeface="MB Corpo S Text Office" pitchFamily="34" charset="-120"/>
+              </a:rPr>
+              <a:t>Liefert die Kennung keine Produkte, prüfen Sie Erstzulassungsdatum und Laufleistung: Fahrzeuge über dem Höchstalter oder der Maximallaufleistung des Produkts erhalten keine Ergebnisse (5.3).</a:t>
             </a:r>
             <a:endParaRPr lang="en-US" sz="900" dirty="0"/>
           </a:p>
